--- a/Lesson08-RagAgent/Lesson08-RagAgent.pptx
+++ b/Lesson08-RagAgent/Lesson08-RagAgent.pptx
@@ -1039,7 +1039,7 @@
           <a:p>
             <a:r>
               <a:rPr lang="en-US" dirty="0"/>
-              <a:t>This is the prompt template from Step 8, shown exactly as it appears in the code, including a small typo, provide context. It makes the model a company librarian and restricts it to the supplied context. The lines in red are the grounding rules: if the context doesn't contain the answer, say I don't have enough information to answer that question; don't make anything up; don't use outside knowledge; don't add information that isn't in the context. Giving the model an explicit way out is what reduces hallucination: it has a sanctioned thing to say instead of guessing. Two placeholders, context and question, are filled through KernelArguments with the best match's text and the user's question.</a:t>
+              <a:t>This is the prompt template from Step 8, shown exactly as it appears in the code. It makes the model a company librarian and restricts it to the supplied context. The lines in red are the grounding rules: if the context doesn't contain the answer, say I don't have enough information to answer that question; don't make anything up; don't use outside knowledge; don't add information that isn't in the context. Giving the model an explicit way out is what reduces hallucination: it has a sanctioned thing to say instead of guessing. Two placeholders, context and question, are filled through KernelArguments with the best match's text and the user's question.</a:t>
             </a:r>
             <a:endParaRPr lang="en-US" dirty="0"/>
           </a:p>
@@ -7270,7 +7270,7 @@
                 <a:ea typeface="Courier New" pitchFamily="34" charset="-122"/>
                 <a:cs typeface="Courier New" pitchFamily="34" charset="-120"/>
               </a:rPr>
-              <a:t>question using ONLY the provide context.</a:t>
+              <a:t>question using ONLY the provided context.</a:t>
             </a:r>
             <a:endParaRPr lang="en-US" sz="1000" dirty="0"/>
           </a:p>
